--- a/public/fun/pack/pptx/wedding/결혼식_44_오시는길중심_대보름달집.pptx
+++ b/public/fun/pack/pptx/wedding/결혼식_44_오시는길중심_대보름달집.pptx
@@ -3286,6 +3286,14 @@
 <file path=ppt/slides/slide1.xml><?xml version="1.0" encoding="utf-8"?>
 <p:sld xmlns:a="http://schemas.openxmlformats.org/drawingml/2006/main" xmlns:p="http://schemas.openxmlformats.org/presentationml/2006/main" xmlns:r="http://schemas.openxmlformats.org/officeDocument/2006/relationships">
   <p:cSld>
+    <p:bg>
+      <p:bgPr>
+        <a:solidFill>
+          <a:srgbClr val="F6EDD5"/>
+        </a:solidFill>
+        <a:effectLst/>
+      </p:bgPr>
+    </p:bg>
     <p:spTree>
       <p:nvGrpSpPr>
         <p:cNvPr id="1" name=""/>
@@ -3293,30 +3301,116 @@
         <p:nvPr/>
       </p:nvGrpSpPr>
       <p:grpSpPr/>
-      <p:pic>
-        <p:nvPicPr>
-          <p:cNvPr id="3" name="표지 그림" descr="wedding-44.jpg"/>
-          <p:cNvPicPr>
-            <a:picLocks noChangeAspect="1"/>
-          </p:cNvPicPr>
+      <p:sp>
+        <p:nvSpPr>
+          <p:cNvPr id="3" name="사진 자리"/>
+          <p:cNvSpPr/>
           <p:nvPr/>
-        </p:nvPicPr>
-        <p:blipFill>
-          <a:blip r:embed="rId2"/>
-          <a:stretch>
-            <a:fillRect/>
-          </a:stretch>
-        </p:blipFill>
-        <p:spPr>
-          <a:xfrm>
-            <a:off x="0" y="0"/>
-            <a:ext cx="12191695" cy="6858000"/>
+        </p:nvSpPr>
+        <p:spPr>
+          <a:xfrm>
+            <a:off x="7802684" y="0"/>
+            <a:ext cx="4389010" cy="6858000"/>
           </a:xfrm>
           <a:prstGeom prst="rect">
             <a:avLst/>
           </a:prstGeom>
-        </p:spPr>
-      </p:pic>
+          <a:solidFill>
+            <a:srgbClr val="EBDAAD"/>
+          </a:solidFill>
+          <a:ln>
+            <a:noFill/>
+          </a:ln>
+        </p:spPr>
+        <p:txBody>
+          <a:bodyPr rtlCol="0" anchor="ctr" wrap="square" lIns="54864" rIns="54864" tIns="27432" bIns="27432">
+            <a:noAutofit/>
+          </a:bodyPr>
+          <a:lstStyle/>
+          <a:p>
+            <a:pPr algn="ctr">
+              <a:lnSpc>
+                <a:spcPct val="100000"/>
+              </a:lnSpc>
+            </a:pPr>
+            <a:r>
+              <a:rPr sz="1400" b="0" i="0">
+                <a:solidFill>
+                  <a:srgbClr val="494027"/>
+                </a:solidFill>
+              </a:rPr>
+              <a:t>사진을 넣어 주세요</a:t>
+            </a:r>
+          </a:p>
+        </p:txBody>
+      </p:sp>
+      <p:sp>
+        <p:nvSpPr>
+          <p:cNvPr id="4" name="장식"/>
+          <p:cNvSpPr/>
+          <p:nvPr/>
+        </p:nvSpPr>
+        <p:spPr>
+          <a:xfrm>
+            <a:off x="8168435" y="365760"/>
+            <a:ext cx="3657508" cy="6126480"/>
+          </a:xfrm>
+          <a:prstGeom prst="rect">
+            <a:avLst/>
+          </a:prstGeom>
+          <a:noFill/>
+          <a:ln w="9525">
+            <a:solidFill>
+              <a:srgbClr val="26231F"/>
+            </a:solidFill>
+          </a:ln>
+        </p:spPr>
+        <p:txBody>
+          <a:bodyPr rtlCol="0" anchor="ctr"/>
+          <a:lstStyle/>
+          <a:p>
+            <a:pPr algn="ctr"/>
+          </a:p>
+        </p:txBody>
+      </p:sp>
+      <p:sp>
+        <p:nvSpPr>
+          <p:cNvPr id="5" name="라벨"/>
+          <p:cNvSpPr txBox="1"/>
+          <p:nvPr/>
+        </p:nvSpPr>
+        <p:spPr>
+          <a:xfrm>
+            <a:off x="822960" y="2148840"/>
+            <a:ext cx="5608179" cy="274320"/>
+          </a:xfrm>
+          <a:prstGeom prst="rect">
+            <a:avLst/>
+          </a:prstGeom>
+          <a:noFill/>
+        </p:spPr>
+        <p:txBody>
+          <a:bodyPr wrap="square" lIns="54864" rIns="54864" tIns="27432" bIns="27432" anchor="t">
+            <a:noAutofit/>
+          </a:bodyPr>
+          <a:lstStyle/>
+          <a:p>
+            <a:pPr algn="l">
+              <a:lnSpc>
+                <a:spcPct val="115000"/>
+              </a:lnSpc>
+            </a:pPr>
+            <a:r>
+              <a:rPr sz="1000" b="1" i="0" spc="250">
+                <a:solidFill>
+                  <a:srgbClr val="26231F"/>
+                </a:solidFill>
+              </a:rPr>
+              <a:t>WEDDING</a:t>
+            </a:r>
+          </a:p>
+        </p:txBody>
+      </p:sp>
       <p:sp>
         <p:nvSpPr>
           <p:cNvPr id="2" name="Title 1"/>
@@ -3329,8 +3423,8 @@
         </p:nvSpPr>
         <p:spPr>
           <a:xfrm>
-            <a:off x="853418" y="2057400"/>
-            <a:ext cx="6095847" cy="1554480"/>
+            <a:off x="822960" y="2606040"/>
+            <a:ext cx="5608179" cy="1188720"/>
           </a:xfrm>
         </p:spPr>
         <p:txBody>
@@ -3347,7 +3441,7 @@
             <a:r>
               <a:rPr sz="3600" b="1" i="0">
                 <a:solidFill>
-                  <a:srgbClr val="544212"/>
+                  <a:srgbClr val="26231F"/>
                 </a:solidFill>
               </a:rPr>
               <a:t>저희 결혼합니다</a:t>
@@ -3357,14 +3451,14 @@
       </p:sp>
       <p:sp>
         <p:nvSpPr>
-          <p:cNvPr id="4" name="한 줄 문구"/>
+          <p:cNvPr id="6" name="한 줄 문구"/>
           <p:cNvSpPr txBox="1"/>
           <p:nvPr/>
         </p:nvSpPr>
         <p:spPr>
           <a:xfrm>
-            <a:off x="853418" y="3749039"/>
-            <a:ext cx="6095847" cy="822960"/>
+            <a:off x="822960" y="3886200"/>
+            <a:ext cx="5608179" cy="822960"/>
           </a:xfrm>
           <a:prstGeom prst="rect">
             <a:avLst/>
@@ -3383,26 +3477,26 @@
               </a:lnSpc>
             </a:pPr>
             <a:r>
-              <a:rPr sz="1700" b="0" i="1">
-                <a:solidFill>
-                  <a:srgbClr val="544212"/>
+              <a:rPr sz="1700" b="0" i="0">
+                <a:solidFill>
+                  <a:srgbClr val="26231F"/>
                 </a:solidFill>
               </a:rPr>
-              <a:t>눈이 오면 대중교통이 편합니다</a:t>
-            </a:r>
-          </a:p>
-        </p:txBody>
-      </p:sp>
-      <p:sp>
-        <p:nvSpPr>
-          <p:cNvPr id="5" name="안내 문구"/>
+              <a:t>대중교통으로 오시는 게 편합니다</a:t>
+            </a:r>
+          </a:p>
+        </p:txBody>
+      </p:sp>
+      <p:sp>
+        <p:nvSpPr>
+          <p:cNvPr id="7" name="안내 문구"/>
           <p:cNvSpPr txBox="1"/>
           <p:nvPr/>
         </p:nvSpPr>
         <p:spPr>
           <a:xfrm>
-            <a:off x="853418" y="4617720"/>
-            <a:ext cx="6095847" cy="914400"/>
+            <a:off x="822960" y="4754880"/>
+            <a:ext cx="5608179" cy="914400"/>
           </a:xfrm>
           <a:prstGeom prst="rect">
             <a:avLst/>
@@ -3423,7 +3517,7 @@
             <a:r>
               <a:rPr sz="1400" b="0" i="0">
                 <a:solidFill>
-                  <a:srgbClr val="666666"/>
+                  <a:srgbClr val="26231F"/>
                 </a:solidFill>
               </a:rPr>
               <a:t>신랑 이름 ♥ 신부 이름</a:t>
@@ -3438,10 +3532,10 @@
             <a:r>
               <a:rPr sz="1400" b="0" i="0">
                 <a:solidFill>
-                  <a:srgbClr val="666666"/>
+                  <a:srgbClr val="26231F"/>
                 </a:solidFill>
               </a:rPr>
-              <a:t>2027. 00. 00 · 예식장 이름</a:t>
+              <a:t>날짜 입력 · 예식장 이름</a:t>
             </a:r>
           </a:p>
         </p:txBody>
@@ -3460,7 +3554,7 @@
     <p:bg>
       <p:bgPr>
         <a:solidFill>
-          <a:srgbClr val="FBF8EE"/>
+          <a:srgbClr val="FFFFFF"/>
         </a:solidFill>
         <a:effectLst/>
       </p:bgPr>
@@ -3479,18 +3573,15 @@
           <p:nvPr/>
         </p:nvSpPr>
         <p:spPr>
-          <a:xfrm rot="10800000">
-            <a:off x="10637215" y="0"/>
-            <a:ext cx="914400" cy="1554480"/>
-          </a:xfrm>
-          <a:prstGeom prst="round2SameRect">
-            <a:avLst>
-              <a:gd name="adj1" fmla="val 50000"/>
-              <a:gd name="adj2" fmla="val 0"/>
-            </a:avLst>
+          <a:xfrm>
+            <a:off x="0" y="6565392"/>
+            <a:ext cx="12191695" cy="292608"/>
+          </a:xfrm>
+          <a:prstGeom prst="rect">
+            <a:avLst/>
           </a:prstGeom>
           <a:solidFill>
-            <a:srgbClr val="F6EACB"/>
+            <a:srgbClr val="EBDAAD"/>
           </a:solidFill>
           <a:ln>
             <a:noFill/>
@@ -3506,6 +3597,104 @@
       </p:sp>
       <p:sp>
         <p:nvSpPr>
+          <p:cNvPr id="4" name="장식"/>
+          <p:cNvSpPr/>
+          <p:nvPr/>
+        </p:nvSpPr>
+        <p:spPr>
+          <a:xfrm>
+            <a:off x="640080" y="566928"/>
+            <a:ext cx="64008" cy="868680"/>
+          </a:xfrm>
+          <a:prstGeom prst="roundRect">
+            <a:avLst>
+              <a:gd name="adj" fmla="val 50000"/>
+            </a:avLst>
+          </a:prstGeom>
+          <a:solidFill>
+            <a:srgbClr val="E1CE98"/>
+          </a:solidFill>
+          <a:ln>
+            <a:noFill/>
+          </a:ln>
+        </p:spPr>
+        <p:txBody>
+          <a:bodyPr rtlCol="0" anchor="ctr"/>
+          <a:lstStyle/>
+          <a:p>
+            <a:pPr algn="ctr"/>
+          </a:p>
+        </p:txBody>
+      </p:sp>
+      <p:sp>
+        <p:nvSpPr>
+          <p:cNvPr id="5" name="상단 라벨"/>
+          <p:cNvSpPr txBox="1"/>
+          <p:nvPr/>
+        </p:nvSpPr>
+        <p:spPr>
+          <a:xfrm>
+            <a:off x="868680" y="274320"/>
+            <a:ext cx="5486400" cy="274320"/>
+          </a:xfrm>
+          <a:prstGeom prst="rect">
+            <a:avLst/>
+          </a:prstGeom>
+          <a:noFill/>
+        </p:spPr>
+        <p:txBody>
+          <a:bodyPr wrap="square" lIns="54864" rIns="54864" tIns="27432" bIns="27432" anchor="ctr">
+            <a:noAutofit/>
+          </a:bodyPr>
+          <a:lstStyle/>
+          <a:p>
+            <a:pPr algn="l">
+              <a:lnSpc>
+                <a:spcPct val="115000"/>
+              </a:lnSpc>
+            </a:pPr>
+            <a:r>
+              <a:rPr sz="900" b="1" i="0" spc="250">
+                <a:solidFill>
+                  <a:srgbClr val="8E8780"/>
+                </a:solidFill>
+              </a:rPr>
+              <a:t>WEDDING</a:t>
+            </a:r>
+          </a:p>
+        </p:txBody>
+      </p:sp>
+      <p:sp>
+        <p:nvSpPr>
+          <p:cNvPr id="6" name="포인트"/>
+          <p:cNvSpPr/>
+          <p:nvPr/>
+        </p:nvSpPr>
+        <p:spPr>
+          <a:xfrm>
+            <a:off x="11167567" y="667512"/>
+            <a:ext cx="310896" cy="310896"/>
+          </a:xfrm>
+          <a:prstGeom prst="round2SameRect">
+            <a:avLst/>
+          </a:prstGeom>
+          <a:solidFill>
+            <a:srgbClr val="EBDAAD"/>
+          </a:solidFill>
+          <a:ln>
+            <a:noFill/>
+          </a:ln>
+        </p:spPr>
+        <p:txBody>
+          <a:bodyPr rtlCol="0" anchor="ctr"/>
+          <a:lstStyle/>
+          <a:p>
+            <a:pPr algn="ctr"/>
+          </a:p>
+        </p:txBody>
+      </p:sp>
+      <p:sp>
+        <p:nvSpPr>
           <p:cNvPr id="2" name="Title 1"/>
           <p:cNvSpPr>
             <a:spLocks noGrp="1"/>
@@ -3516,8 +3705,8 @@
         </p:nvSpPr>
         <p:spPr>
           <a:xfrm>
-            <a:off x="640080" y="457200"/>
-            <a:ext cx="9722815" cy="868680"/>
+            <a:off x="868680" y="566928"/>
+            <a:ext cx="9448495" cy="868680"/>
           </a:xfrm>
         </p:spPr>
         <p:txBody>
@@ -3534,7 +3723,7 @@
             <a:r>
               <a:rPr sz="3000" b="1" i="0">
                 <a:solidFill>
-                  <a:srgbClr val="544212"/>
+                  <a:srgbClr val="26231F"/>
                 </a:solidFill>
               </a:rPr>
               <a:t>신랑 · 신부 소개</a:t>
@@ -3544,25 +3733,23 @@
       </p:sp>
       <p:sp>
         <p:nvSpPr>
-          <p:cNvPr id="4" name="사진 자리"/>
+          <p:cNvPr id="7" name="사진 자리"/>
           <p:cNvSpPr/>
           <p:nvPr/>
         </p:nvSpPr>
         <p:spPr>
           <a:xfrm>
-            <a:off x="1939213" y="1600200"/>
-            <a:ext cx="2400300" cy="2400300"/>
+            <a:off x="2042083" y="1783080"/>
+            <a:ext cx="2194560" cy="2194560"/>
           </a:xfrm>
           <a:prstGeom prst="ellipse">
             <a:avLst/>
           </a:prstGeom>
           <a:solidFill>
-            <a:srgbClr val="F6EACB"/>
+            <a:srgbClr val="F6EDD5"/>
           </a:solidFill>
           <a:ln w="19050">
-            <a:solidFill>
-              <a:srgbClr val="A78425"/>
-            </a:solidFill>
+            <a:noFill/>
             <a:prstDash val="dash"/>
           </a:ln>
         </p:spPr>
@@ -3580,7 +3767,7 @@
             <a:r>
               <a:rPr sz="1200" b="0" i="0">
                 <a:solidFill>
-                  <a:srgbClr val="544212"/>
+                  <a:srgbClr val="8E8780"/>
                 </a:solidFill>
               </a:rPr>
               <a:t>사진</a:t>
@@ -3590,13 +3777,13 @@
       </p:sp>
       <p:sp>
         <p:nvSpPr>
-          <p:cNvPr id="5" name="TextBox 4"/>
+          <p:cNvPr id="8" name="TextBox 7"/>
           <p:cNvSpPr txBox="1"/>
           <p:nvPr/>
         </p:nvSpPr>
         <p:spPr>
           <a:xfrm>
-            <a:off x="640080" y="4091939"/>
+            <a:off x="640080" y="4069079"/>
             <a:ext cx="4998567" cy="411480"/>
           </a:xfrm>
           <a:prstGeom prst="rect">
@@ -3618,7 +3805,7 @@
             <a:r>
               <a:rPr sz="1600" b="1" i="0">
                 <a:solidFill>
-                  <a:srgbClr val="544212"/>
+                  <a:srgbClr val="494027"/>
                 </a:solidFill>
               </a:rPr>
               <a:t>신랑</a:t>
@@ -3628,14 +3815,14 @@
       </p:sp>
       <p:sp>
         <p:nvSpPr>
-          <p:cNvPr id="6" name="TextBox 5"/>
+          <p:cNvPr id="9" name="TextBox 8"/>
           <p:cNvSpPr txBox="1"/>
           <p:nvPr/>
         </p:nvSpPr>
         <p:spPr>
           <a:xfrm>
-            <a:off x="731519" y="4549140"/>
-            <a:ext cx="4815687" cy="1851660"/>
+            <a:off x="731519" y="4526279"/>
+            <a:ext cx="4815687" cy="1645919"/>
           </a:xfrm>
           <a:prstGeom prst="rect">
             <a:avLst/>
@@ -3696,25 +3883,23 @@
       </p:sp>
       <p:sp>
         <p:nvSpPr>
-          <p:cNvPr id="7" name="사진 자리"/>
+          <p:cNvPr id="10" name="사진 자리"/>
           <p:cNvSpPr/>
           <p:nvPr/>
         </p:nvSpPr>
         <p:spPr>
           <a:xfrm>
-            <a:off x="7852181" y="1600200"/>
-            <a:ext cx="2400300" cy="2400300"/>
+            <a:off x="7955051" y="1783080"/>
+            <a:ext cx="2194560" cy="2194560"/>
           </a:xfrm>
           <a:prstGeom prst="ellipse">
             <a:avLst/>
           </a:prstGeom>
           <a:solidFill>
-            <a:srgbClr val="F6EACB"/>
+            <a:srgbClr val="F6EDD5"/>
           </a:solidFill>
           <a:ln w="19050">
-            <a:solidFill>
-              <a:srgbClr val="A78425"/>
-            </a:solidFill>
+            <a:noFill/>
             <a:prstDash val="dash"/>
           </a:ln>
         </p:spPr>
@@ -3732,7 +3917,7 @@
             <a:r>
               <a:rPr sz="1200" b="0" i="0">
                 <a:solidFill>
-                  <a:srgbClr val="544212"/>
+                  <a:srgbClr val="8E8780"/>
                 </a:solidFill>
               </a:rPr>
               <a:t>사진</a:t>
@@ -3742,13 +3927,13 @@
       </p:sp>
       <p:sp>
         <p:nvSpPr>
-          <p:cNvPr id="8" name="TextBox 7"/>
+          <p:cNvPr id="11" name="TextBox 10"/>
           <p:cNvSpPr txBox="1"/>
           <p:nvPr/>
         </p:nvSpPr>
         <p:spPr>
           <a:xfrm>
-            <a:off x="6553047" y="4091939"/>
+            <a:off x="6553047" y="4069079"/>
             <a:ext cx="4998567" cy="411480"/>
           </a:xfrm>
           <a:prstGeom prst="rect">
@@ -3770,7 +3955,7 @@
             <a:r>
               <a:rPr sz="1600" b="1" i="0">
                 <a:solidFill>
-                  <a:srgbClr val="544212"/>
+                  <a:srgbClr val="494027"/>
                 </a:solidFill>
               </a:rPr>
               <a:t>신부</a:t>
@@ -3780,14 +3965,14 @@
       </p:sp>
       <p:sp>
         <p:nvSpPr>
-          <p:cNvPr id="9" name="TextBox 8"/>
+          <p:cNvPr id="12" name="TextBox 11"/>
           <p:cNvSpPr txBox="1"/>
           <p:nvPr/>
         </p:nvSpPr>
         <p:spPr>
           <a:xfrm>
-            <a:off x="6644487" y="4549140"/>
-            <a:ext cx="4815687" cy="1851660"/>
+            <a:off x="6644487" y="4526279"/>
+            <a:ext cx="4815687" cy="1645919"/>
           </a:xfrm>
           <a:prstGeom prst="rect">
             <a:avLst/>
@@ -3860,7 +4045,7 @@
     <p:bg>
       <p:bgPr>
         <a:solidFill>
-          <a:srgbClr val="FBF8EE"/>
+          <a:srgbClr val="FFFFFF"/>
         </a:solidFill>
         <a:effectLst/>
       </p:bgPr>
@@ -3879,18 +4064,15 @@
           <p:nvPr/>
         </p:nvSpPr>
         <p:spPr>
-          <a:xfrm rot="10800000">
-            <a:off x="10637215" y="0"/>
-            <a:ext cx="914400" cy="1554480"/>
-          </a:xfrm>
-          <a:prstGeom prst="round2SameRect">
-            <a:avLst>
-              <a:gd name="adj1" fmla="val 50000"/>
-              <a:gd name="adj2" fmla="val 0"/>
-            </a:avLst>
+          <a:xfrm>
+            <a:off x="0" y="6565392"/>
+            <a:ext cx="12191695" cy="292608"/>
+          </a:xfrm>
+          <a:prstGeom prst="rect">
+            <a:avLst/>
           </a:prstGeom>
           <a:solidFill>
-            <a:srgbClr val="F6EACB"/>
+            <a:srgbClr val="EBDAAD"/>
           </a:solidFill>
           <a:ln>
             <a:noFill/>
@@ -3906,6 +4088,104 @@
       </p:sp>
       <p:sp>
         <p:nvSpPr>
+          <p:cNvPr id="4" name="장식"/>
+          <p:cNvSpPr/>
+          <p:nvPr/>
+        </p:nvSpPr>
+        <p:spPr>
+          <a:xfrm>
+            <a:off x="640080" y="566928"/>
+            <a:ext cx="64008" cy="868680"/>
+          </a:xfrm>
+          <a:prstGeom prst="roundRect">
+            <a:avLst>
+              <a:gd name="adj" fmla="val 50000"/>
+            </a:avLst>
+          </a:prstGeom>
+          <a:solidFill>
+            <a:srgbClr val="E1CE98"/>
+          </a:solidFill>
+          <a:ln>
+            <a:noFill/>
+          </a:ln>
+        </p:spPr>
+        <p:txBody>
+          <a:bodyPr rtlCol="0" anchor="ctr"/>
+          <a:lstStyle/>
+          <a:p>
+            <a:pPr algn="ctr"/>
+          </a:p>
+        </p:txBody>
+      </p:sp>
+      <p:sp>
+        <p:nvSpPr>
+          <p:cNvPr id="5" name="상단 라벨"/>
+          <p:cNvSpPr txBox="1"/>
+          <p:nvPr/>
+        </p:nvSpPr>
+        <p:spPr>
+          <a:xfrm>
+            <a:off x="868680" y="274320"/>
+            <a:ext cx="5486400" cy="274320"/>
+          </a:xfrm>
+          <a:prstGeom prst="rect">
+            <a:avLst/>
+          </a:prstGeom>
+          <a:noFill/>
+        </p:spPr>
+        <p:txBody>
+          <a:bodyPr wrap="square" lIns="54864" rIns="54864" tIns="27432" bIns="27432" anchor="ctr">
+            <a:noAutofit/>
+          </a:bodyPr>
+          <a:lstStyle/>
+          <a:p>
+            <a:pPr algn="l">
+              <a:lnSpc>
+                <a:spcPct val="115000"/>
+              </a:lnSpc>
+            </a:pPr>
+            <a:r>
+              <a:rPr sz="900" b="1" i="0" spc="250">
+                <a:solidFill>
+                  <a:srgbClr val="8E8780"/>
+                </a:solidFill>
+              </a:rPr>
+              <a:t>WEDDING</a:t>
+            </a:r>
+          </a:p>
+        </p:txBody>
+      </p:sp>
+      <p:sp>
+        <p:nvSpPr>
+          <p:cNvPr id="6" name="포인트"/>
+          <p:cNvSpPr/>
+          <p:nvPr/>
+        </p:nvSpPr>
+        <p:spPr>
+          <a:xfrm>
+            <a:off x="11167567" y="667512"/>
+            <a:ext cx="310896" cy="310896"/>
+          </a:xfrm>
+          <a:prstGeom prst="round2SameRect">
+            <a:avLst/>
+          </a:prstGeom>
+          <a:solidFill>
+            <a:srgbClr val="EBDAAD"/>
+          </a:solidFill>
+          <a:ln>
+            <a:noFill/>
+          </a:ln>
+        </p:spPr>
+        <p:txBody>
+          <a:bodyPr rtlCol="0" anchor="ctr"/>
+          <a:lstStyle/>
+          <a:p>
+            <a:pPr algn="ctr"/>
+          </a:p>
+        </p:txBody>
+      </p:sp>
+      <p:sp>
+        <p:nvSpPr>
           <p:cNvPr id="2" name="Title 1"/>
           <p:cNvSpPr>
             <a:spLocks noGrp="1"/>
@@ -3916,8 +4196,8 @@
         </p:nvSpPr>
         <p:spPr>
           <a:xfrm>
-            <a:off x="640080" y="457200"/>
-            <a:ext cx="9722815" cy="868680"/>
+            <a:off x="868680" y="566928"/>
+            <a:ext cx="9448495" cy="868680"/>
           </a:xfrm>
         </p:spPr>
         <p:txBody>
@@ -3934,7 +4214,7 @@
             <a:r>
               <a:rPr sz="3000" b="1" i="0">
                 <a:solidFill>
-                  <a:srgbClr val="544212"/>
+                  <a:srgbClr val="26231F"/>
                 </a:solidFill>
               </a:rPr>
               <a:t>오시는 길</a:t>
@@ -3944,14 +4224,14 @@
       </p:sp>
       <p:sp>
         <p:nvSpPr>
-          <p:cNvPr id="4" name="사진 자리"/>
+          <p:cNvPr id="7" name="사진 자리"/>
           <p:cNvSpPr/>
           <p:nvPr/>
         </p:nvSpPr>
         <p:spPr>
           <a:xfrm>
-            <a:off x="640080" y="1600200"/>
-            <a:ext cx="6035040" cy="4800600"/>
+            <a:off x="640080" y="1783080"/>
+            <a:ext cx="6035040" cy="4389120"/>
           </a:xfrm>
           <a:prstGeom prst="roundRect">
             <a:avLst>
@@ -3959,12 +4239,10 @@
             </a:avLst>
           </a:prstGeom>
           <a:solidFill>
-            <a:srgbClr val="F6EACB"/>
+            <a:srgbClr val="F6EDD5"/>
           </a:solidFill>
           <a:ln w="19050">
-            <a:solidFill>
-              <a:srgbClr val="A78425"/>
-            </a:solidFill>
+            <a:noFill/>
             <a:prstDash val="dash"/>
           </a:ln>
         </p:spPr>
@@ -3982,7 +4260,7 @@
             <a:r>
               <a:rPr sz="1400" b="0" i="0">
                 <a:solidFill>
-                  <a:srgbClr val="544212"/>
+                  <a:srgbClr val="8E8780"/>
                 </a:solidFill>
               </a:rPr>
               <a:t>약도 · 지도를 넣어 주세요</a:t>
@@ -3992,14 +4270,14 @@
       </p:sp>
       <p:graphicFrame>
         <p:nvGraphicFramePr>
-          <p:cNvPr id="5" name="표"/>
+          <p:cNvPr id="8" name="표"/>
           <p:cNvGraphicFramePr>
             <a:graphicFrameLocks noGrp="1"/>
           </p:cNvGraphicFramePr>
           <p:nvPr/>
         </p:nvGraphicFramePr>
         <p:xfrm>
-          <a:off x="7040880" y="1600200"/>
+          <a:off x="7040880" y="1783080"/>
           <a:ext cx="4510735" cy="3291840"/>
         </p:xfrm>
         <a:graphic>
@@ -4022,7 +4300,7 @@
                       <a:r>
                         <a:rPr sz="1400" b="1">
                           <a:solidFill>
-                            <a:srgbClr val="544212"/>
+                            <a:srgbClr val="494027"/>
                           </a:solidFill>
                         </a:rPr>
                         <a:t>예식장</a:t>
@@ -4032,30 +4310,30 @@
                   <a:tcPr anchor="ctr" marL="73152" marR="73152">
                     <a:lnL w="9525" cap="flat" cmpd="sng" algn="ctr">
                       <a:solidFill>
-                        <a:srgbClr val="F6EACB"/>
+                        <a:srgbClr val="F6EDD5"/>
                       </a:solidFill>
                       <a:prstDash val="solid"/>
                     </a:lnL>
                     <a:lnR w="9525" cap="flat" cmpd="sng" algn="ctr">
                       <a:solidFill>
-                        <a:srgbClr val="F6EACB"/>
+                        <a:srgbClr val="F6EDD5"/>
                       </a:solidFill>
                       <a:prstDash val="solid"/>
                     </a:lnR>
                     <a:lnT w="9525" cap="flat" cmpd="sng" algn="ctr">
                       <a:solidFill>
-                        <a:srgbClr val="F6EACB"/>
+                        <a:srgbClr val="F6EDD5"/>
                       </a:solidFill>
                       <a:prstDash val="solid"/>
                     </a:lnT>
                     <a:lnB w="9525" cap="flat" cmpd="sng" algn="ctr">
                       <a:solidFill>
-                        <a:srgbClr val="F6EACB"/>
+                        <a:srgbClr val="F6EDD5"/>
                       </a:solidFill>
                       <a:prstDash val="solid"/>
                     </a:lnB>
                     <a:solidFill>
-                      <a:srgbClr val="F6EACB"/>
+                      <a:srgbClr val="F6EDD5"/>
                     </a:solidFill>
                   </a:tcPr>
                 </a:tc>
@@ -4068,7 +4346,7 @@
                       <a:r>
                         <a:rPr sz="1400" b="0">
                           <a:solidFill>
-                            <a:srgbClr val="2B2B2B"/>
+                            <a:srgbClr val="26231F"/>
                           </a:solidFill>
                         </a:rPr>
                         <a:t>입력하세요</a:t>
@@ -4078,30 +4356,30 @@
                   <a:tcPr anchor="ctr" marL="73152" marR="73152">
                     <a:lnL w="9525" cap="flat" cmpd="sng" algn="ctr">
                       <a:solidFill>
-                        <a:srgbClr val="F6EACB"/>
+                        <a:srgbClr val="F6EDD5"/>
                       </a:solidFill>
                       <a:prstDash val="solid"/>
                     </a:lnL>
                     <a:lnR w="9525" cap="flat" cmpd="sng" algn="ctr">
                       <a:solidFill>
-                        <a:srgbClr val="F6EACB"/>
+                        <a:srgbClr val="F6EDD5"/>
                       </a:solidFill>
                       <a:prstDash val="solid"/>
                     </a:lnR>
                     <a:lnT w="9525" cap="flat" cmpd="sng" algn="ctr">
                       <a:solidFill>
-                        <a:srgbClr val="F6EACB"/>
+                        <a:srgbClr val="F6EDD5"/>
                       </a:solidFill>
                       <a:prstDash val="solid"/>
                     </a:lnT>
                     <a:lnB w="9525" cap="flat" cmpd="sng" algn="ctr">
                       <a:solidFill>
-                        <a:srgbClr val="F6EACB"/>
+                        <a:srgbClr val="F6EDD5"/>
                       </a:solidFill>
                       <a:prstDash val="solid"/>
                     </a:lnB>
                     <a:solidFill>
-                      <a:srgbClr val="FBF8EE"/>
+                      <a:srgbClr val="FBF7EC"/>
                     </a:solidFill>
                   </a:tcPr>
                 </a:tc>
@@ -4116,7 +4394,7 @@
                       <a:r>
                         <a:rPr sz="1400" b="1">
                           <a:solidFill>
-                            <a:srgbClr val="544212"/>
+                            <a:srgbClr val="494027"/>
                           </a:solidFill>
                         </a:rPr>
                         <a:t>주소</a:t>
@@ -4126,30 +4404,30 @@
                   <a:tcPr anchor="ctr" marL="73152" marR="73152">
                     <a:lnL w="9525" cap="flat" cmpd="sng" algn="ctr">
                       <a:solidFill>
-                        <a:srgbClr val="F6EACB"/>
+                        <a:srgbClr val="F6EDD5"/>
                       </a:solidFill>
                       <a:prstDash val="solid"/>
                     </a:lnL>
                     <a:lnR w="9525" cap="flat" cmpd="sng" algn="ctr">
                       <a:solidFill>
-                        <a:srgbClr val="F6EACB"/>
+                        <a:srgbClr val="F6EDD5"/>
                       </a:solidFill>
                       <a:prstDash val="solid"/>
                     </a:lnR>
                     <a:lnT w="9525" cap="flat" cmpd="sng" algn="ctr">
                       <a:solidFill>
-                        <a:srgbClr val="F6EACB"/>
+                        <a:srgbClr val="F6EDD5"/>
                       </a:solidFill>
                       <a:prstDash val="solid"/>
                     </a:lnT>
                     <a:lnB w="9525" cap="flat" cmpd="sng" algn="ctr">
                       <a:solidFill>
-                        <a:srgbClr val="F6EACB"/>
+                        <a:srgbClr val="F6EDD5"/>
                       </a:solidFill>
                       <a:prstDash val="solid"/>
                     </a:lnB>
                     <a:solidFill>
-                      <a:srgbClr val="F6EACB"/>
+                      <a:srgbClr val="F6EDD5"/>
                     </a:solidFill>
                   </a:tcPr>
                 </a:tc>
@@ -4162,7 +4440,7 @@
                       <a:r>
                         <a:rPr sz="1400" b="0">
                           <a:solidFill>
-                            <a:srgbClr val="2B2B2B"/>
+                            <a:srgbClr val="26231F"/>
                           </a:solidFill>
                         </a:rPr>
                         <a:t>입력하세요</a:t>
@@ -4172,25 +4450,25 @@
                   <a:tcPr anchor="ctr" marL="73152" marR="73152">
                     <a:lnL w="9525" cap="flat" cmpd="sng" algn="ctr">
                       <a:solidFill>
-                        <a:srgbClr val="F6EACB"/>
+                        <a:srgbClr val="F6EDD5"/>
                       </a:solidFill>
                       <a:prstDash val="solid"/>
                     </a:lnL>
                     <a:lnR w="9525" cap="flat" cmpd="sng" algn="ctr">
                       <a:solidFill>
-                        <a:srgbClr val="F6EACB"/>
+                        <a:srgbClr val="F6EDD5"/>
                       </a:solidFill>
                       <a:prstDash val="solid"/>
                     </a:lnR>
                     <a:lnT w="9525" cap="flat" cmpd="sng" algn="ctr">
                       <a:solidFill>
-                        <a:srgbClr val="F6EACB"/>
+                        <a:srgbClr val="F6EDD5"/>
                       </a:solidFill>
                       <a:prstDash val="solid"/>
                     </a:lnT>
                     <a:lnB w="9525" cap="flat" cmpd="sng" algn="ctr">
                       <a:solidFill>
-                        <a:srgbClr val="F6EACB"/>
+                        <a:srgbClr val="F6EDD5"/>
                       </a:solidFill>
                       <a:prstDash val="solid"/>
                     </a:lnB>
@@ -4210,7 +4488,7 @@
                       <a:r>
                         <a:rPr sz="1400" b="1">
                           <a:solidFill>
-                            <a:srgbClr val="544212"/>
+                            <a:srgbClr val="494027"/>
                           </a:solidFill>
                         </a:rPr>
                         <a:t>일시</a:t>
@@ -4220,30 +4498,30 @@
                   <a:tcPr anchor="ctr" marL="73152" marR="73152">
                     <a:lnL w="9525" cap="flat" cmpd="sng" algn="ctr">
                       <a:solidFill>
-                        <a:srgbClr val="F6EACB"/>
+                        <a:srgbClr val="F6EDD5"/>
                       </a:solidFill>
                       <a:prstDash val="solid"/>
                     </a:lnL>
                     <a:lnR w="9525" cap="flat" cmpd="sng" algn="ctr">
                       <a:solidFill>
-                        <a:srgbClr val="F6EACB"/>
+                        <a:srgbClr val="F6EDD5"/>
                       </a:solidFill>
                       <a:prstDash val="solid"/>
                     </a:lnR>
                     <a:lnT w="9525" cap="flat" cmpd="sng" algn="ctr">
                       <a:solidFill>
-                        <a:srgbClr val="F6EACB"/>
+                        <a:srgbClr val="F6EDD5"/>
                       </a:solidFill>
                       <a:prstDash val="solid"/>
                     </a:lnT>
                     <a:lnB w="9525" cap="flat" cmpd="sng" algn="ctr">
                       <a:solidFill>
-                        <a:srgbClr val="F6EACB"/>
+                        <a:srgbClr val="F6EDD5"/>
                       </a:solidFill>
                       <a:prstDash val="solid"/>
                     </a:lnB>
                     <a:solidFill>
-                      <a:srgbClr val="F6EACB"/>
+                      <a:srgbClr val="F6EDD5"/>
                     </a:solidFill>
                   </a:tcPr>
                 </a:tc>
@@ -4256,7 +4534,7 @@
                       <a:r>
                         <a:rPr sz="1400" b="0">
                           <a:solidFill>
-                            <a:srgbClr val="2B2B2B"/>
+                            <a:srgbClr val="26231F"/>
                           </a:solidFill>
                         </a:rPr>
                         <a:t>입력하세요</a:t>
@@ -4266,30 +4544,30 @@
                   <a:tcPr anchor="ctr" marL="73152" marR="73152">
                     <a:lnL w="9525" cap="flat" cmpd="sng" algn="ctr">
                       <a:solidFill>
-                        <a:srgbClr val="F6EACB"/>
+                        <a:srgbClr val="F6EDD5"/>
                       </a:solidFill>
                       <a:prstDash val="solid"/>
                     </a:lnL>
                     <a:lnR w="9525" cap="flat" cmpd="sng" algn="ctr">
                       <a:solidFill>
-                        <a:srgbClr val="F6EACB"/>
+                        <a:srgbClr val="F6EDD5"/>
                       </a:solidFill>
                       <a:prstDash val="solid"/>
                     </a:lnR>
                     <a:lnT w="9525" cap="flat" cmpd="sng" algn="ctr">
                       <a:solidFill>
-                        <a:srgbClr val="F6EACB"/>
+                        <a:srgbClr val="F6EDD5"/>
                       </a:solidFill>
                       <a:prstDash val="solid"/>
                     </a:lnT>
                     <a:lnB w="9525" cap="flat" cmpd="sng" algn="ctr">
                       <a:solidFill>
-                        <a:srgbClr val="F6EACB"/>
+                        <a:srgbClr val="F6EDD5"/>
                       </a:solidFill>
                       <a:prstDash val="solid"/>
                     </a:lnB>
                     <a:solidFill>
-                      <a:srgbClr val="FBF8EE"/>
+                      <a:srgbClr val="FBF7EC"/>
                     </a:solidFill>
                   </a:tcPr>
                 </a:tc>
@@ -4304,7 +4582,7 @@
                       <a:r>
                         <a:rPr sz="1400" b="1">
                           <a:solidFill>
-                            <a:srgbClr val="544212"/>
+                            <a:srgbClr val="494027"/>
                           </a:solidFill>
                         </a:rPr>
                         <a:t>연락처</a:t>
@@ -4314,30 +4592,30 @@
                   <a:tcPr anchor="ctr" marL="73152" marR="73152">
                     <a:lnL w="9525" cap="flat" cmpd="sng" algn="ctr">
                       <a:solidFill>
-                        <a:srgbClr val="F6EACB"/>
+                        <a:srgbClr val="F6EDD5"/>
                       </a:solidFill>
                       <a:prstDash val="solid"/>
                     </a:lnL>
                     <a:lnR w="9525" cap="flat" cmpd="sng" algn="ctr">
                       <a:solidFill>
-                        <a:srgbClr val="F6EACB"/>
+                        <a:srgbClr val="F6EDD5"/>
                       </a:solidFill>
                       <a:prstDash val="solid"/>
                     </a:lnR>
                     <a:lnT w="9525" cap="flat" cmpd="sng" algn="ctr">
                       <a:solidFill>
-                        <a:srgbClr val="F6EACB"/>
+                        <a:srgbClr val="F6EDD5"/>
                       </a:solidFill>
                       <a:prstDash val="solid"/>
                     </a:lnT>
                     <a:lnB w="9525" cap="flat" cmpd="sng" algn="ctr">
                       <a:solidFill>
-                        <a:srgbClr val="F6EACB"/>
+                        <a:srgbClr val="F6EDD5"/>
                       </a:solidFill>
                       <a:prstDash val="solid"/>
                     </a:lnB>
                     <a:solidFill>
-                      <a:srgbClr val="F6EACB"/>
+                      <a:srgbClr val="F6EDD5"/>
                     </a:solidFill>
                   </a:tcPr>
                 </a:tc>
@@ -4350,7 +4628,7 @@
                       <a:r>
                         <a:rPr sz="1400" b="0">
                           <a:solidFill>
-                            <a:srgbClr val="2B2B2B"/>
+                            <a:srgbClr val="26231F"/>
                           </a:solidFill>
                         </a:rPr>
                         <a:t>입력하세요</a:t>
@@ -4360,25 +4638,25 @@
                   <a:tcPr anchor="ctr" marL="73152" marR="73152">
                     <a:lnL w="9525" cap="flat" cmpd="sng" algn="ctr">
                       <a:solidFill>
-                        <a:srgbClr val="F6EACB"/>
+                        <a:srgbClr val="F6EDD5"/>
                       </a:solidFill>
                       <a:prstDash val="solid"/>
                     </a:lnL>
                     <a:lnR w="9525" cap="flat" cmpd="sng" algn="ctr">
                       <a:solidFill>
-                        <a:srgbClr val="F6EACB"/>
+                        <a:srgbClr val="F6EDD5"/>
                       </a:solidFill>
                       <a:prstDash val="solid"/>
                     </a:lnR>
                     <a:lnT w="9525" cap="flat" cmpd="sng" algn="ctr">
                       <a:solidFill>
-                        <a:srgbClr val="F6EACB"/>
+                        <a:srgbClr val="F6EDD5"/>
                       </a:solidFill>
                       <a:prstDash val="solid"/>
                     </a:lnT>
                     <a:lnB w="9525" cap="flat" cmpd="sng" algn="ctr">
                       <a:solidFill>
-                        <a:srgbClr val="F6EACB"/>
+                        <a:srgbClr val="F6EDD5"/>
                       </a:solidFill>
                       <a:prstDash val="solid"/>
                     </a:lnB>
@@ -4406,7 +4684,7 @@
     <p:bg>
       <p:bgPr>
         <a:solidFill>
-          <a:srgbClr val="FBF8EE"/>
+          <a:srgbClr val="FFFFFF"/>
         </a:solidFill>
         <a:effectLst/>
       </p:bgPr>
@@ -4425,18 +4703,15 @@
           <p:nvPr/>
         </p:nvSpPr>
         <p:spPr>
-          <a:xfrm rot="10800000">
-            <a:off x="10637215" y="0"/>
-            <a:ext cx="914400" cy="1554480"/>
-          </a:xfrm>
-          <a:prstGeom prst="round2SameRect">
-            <a:avLst>
-              <a:gd name="adj1" fmla="val 50000"/>
-              <a:gd name="adj2" fmla="val 0"/>
-            </a:avLst>
+          <a:xfrm>
+            <a:off x="0" y="6565392"/>
+            <a:ext cx="12191695" cy="292608"/>
+          </a:xfrm>
+          <a:prstGeom prst="rect">
+            <a:avLst/>
           </a:prstGeom>
           <a:solidFill>
-            <a:srgbClr val="F6EACB"/>
+            <a:srgbClr val="EBDAAD"/>
           </a:solidFill>
           <a:ln>
             <a:noFill/>
@@ -4452,6 +4727,104 @@
       </p:sp>
       <p:sp>
         <p:nvSpPr>
+          <p:cNvPr id="4" name="장식"/>
+          <p:cNvSpPr/>
+          <p:nvPr/>
+        </p:nvSpPr>
+        <p:spPr>
+          <a:xfrm>
+            <a:off x="640080" y="566928"/>
+            <a:ext cx="64008" cy="868680"/>
+          </a:xfrm>
+          <a:prstGeom prst="roundRect">
+            <a:avLst>
+              <a:gd name="adj" fmla="val 50000"/>
+            </a:avLst>
+          </a:prstGeom>
+          <a:solidFill>
+            <a:srgbClr val="E1CE98"/>
+          </a:solidFill>
+          <a:ln>
+            <a:noFill/>
+          </a:ln>
+        </p:spPr>
+        <p:txBody>
+          <a:bodyPr rtlCol="0" anchor="ctr"/>
+          <a:lstStyle/>
+          <a:p>
+            <a:pPr algn="ctr"/>
+          </a:p>
+        </p:txBody>
+      </p:sp>
+      <p:sp>
+        <p:nvSpPr>
+          <p:cNvPr id="5" name="상단 라벨"/>
+          <p:cNvSpPr txBox="1"/>
+          <p:nvPr/>
+        </p:nvSpPr>
+        <p:spPr>
+          <a:xfrm>
+            <a:off x="868680" y="274320"/>
+            <a:ext cx="5486400" cy="274320"/>
+          </a:xfrm>
+          <a:prstGeom prst="rect">
+            <a:avLst/>
+          </a:prstGeom>
+          <a:noFill/>
+        </p:spPr>
+        <p:txBody>
+          <a:bodyPr wrap="square" lIns="54864" rIns="54864" tIns="27432" bIns="27432" anchor="ctr">
+            <a:noAutofit/>
+          </a:bodyPr>
+          <a:lstStyle/>
+          <a:p>
+            <a:pPr algn="l">
+              <a:lnSpc>
+                <a:spcPct val="115000"/>
+              </a:lnSpc>
+            </a:pPr>
+            <a:r>
+              <a:rPr sz="900" b="1" i="0" spc="250">
+                <a:solidFill>
+                  <a:srgbClr val="8E8780"/>
+                </a:solidFill>
+              </a:rPr>
+              <a:t>WEDDING</a:t>
+            </a:r>
+          </a:p>
+        </p:txBody>
+      </p:sp>
+      <p:sp>
+        <p:nvSpPr>
+          <p:cNvPr id="6" name="포인트"/>
+          <p:cNvSpPr/>
+          <p:nvPr/>
+        </p:nvSpPr>
+        <p:spPr>
+          <a:xfrm>
+            <a:off x="11167567" y="667512"/>
+            <a:ext cx="310896" cy="310896"/>
+          </a:xfrm>
+          <a:prstGeom prst="round2SameRect">
+            <a:avLst/>
+          </a:prstGeom>
+          <a:solidFill>
+            <a:srgbClr val="EBDAAD"/>
+          </a:solidFill>
+          <a:ln>
+            <a:noFill/>
+          </a:ln>
+        </p:spPr>
+        <p:txBody>
+          <a:bodyPr rtlCol="0" anchor="ctr"/>
+          <a:lstStyle/>
+          <a:p>
+            <a:pPr algn="ctr"/>
+          </a:p>
+        </p:txBody>
+      </p:sp>
+      <p:sp>
+        <p:nvSpPr>
           <p:cNvPr id="2" name="Title 1"/>
           <p:cNvSpPr>
             <a:spLocks noGrp="1"/>
@@ -4462,8 +4835,8 @@
         </p:nvSpPr>
         <p:spPr>
           <a:xfrm>
-            <a:off x="640080" y="457200"/>
-            <a:ext cx="9722815" cy="868680"/>
+            <a:off x="868680" y="566928"/>
+            <a:ext cx="9448495" cy="868680"/>
           </a:xfrm>
         </p:spPr>
         <p:txBody>
@@ -4480,7 +4853,7 @@
             <a:r>
               <a:rPr sz="3000" b="1" i="0">
                 <a:solidFill>
-                  <a:srgbClr val="544212"/>
+                  <a:srgbClr val="26231F"/>
                 </a:solidFill>
               </a:rPr>
               <a:t>교통 안내</a:t>
@@ -4490,26 +4863,24 @@
       </p:sp>
       <p:sp>
         <p:nvSpPr>
-          <p:cNvPr id="4" name="카드 1"/>
+          <p:cNvPr id="7" name="카드 1"/>
           <p:cNvSpPr/>
           <p:nvPr/>
         </p:nvSpPr>
         <p:spPr>
           <a:xfrm>
-            <a:off x="640080" y="1600200"/>
-            <a:ext cx="3484778" cy="4800600"/>
+            <a:off x="640080" y="1783080"/>
+            <a:ext cx="3484778" cy="4389120"/>
           </a:xfrm>
           <a:prstGeom prst="roundRect">
             <a:avLst>
-              <a:gd name="adj" fmla="val 8000"/>
+              <a:gd name="adj" fmla="val 7000"/>
             </a:avLst>
           </a:prstGeom>
-          <a:solidFill>
-            <a:srgbClr val="FBF8EE"/>
-          </a:solidFill>
+          <a:noFill/>
           <a:ln w="15875">
             <a:solidFill>
-              <a:srgbClr val="F6EACB"/>
+              <a:srgbClr val="E1CE98"/>
             </a:solidFill>
           </a:ln>
         </p:spPr>
@@ -4523,23 +4894,23 @@
       </p:sp>
       <p:sp>
         <p:nvSpPr>
-          <p:cNvPr id="5" name="번호 1"/>
+          <p:cNvPr id="8" name="번호 1"/>
           <p:cNvSpPr/>
           <p:nvPr/>
         </p:nvSpPr>
         <p:spPr>
           <a:xfrm>
-            <a:off x="822959" y="1783080"/>
+            <a:off x="822959" y="1965960"/>
             <a:ext cx="457200" cy="457200"/>
           </a:xfrm>
           <a:prstGeom prst="ellipse">
             <a:avLst/>
           </a:prstGeom>
-          <a:solidFill>
-            <a:srgbClr val="A78425"/>
-          </a:solidFill>
-          <a:ln>
-            <a:noFill/>
+          <a:noFill/>
+          <a:ln w="19050">
+            <a:solidFill>
+              <a:srgbClr val="E1CE98"/>
+            </a:solidFill>
           </a:ln>
         </p:spPr>
         <p:txBody>
@@ -4556,7 +4927,7 @@
             <a:r>
               <a:rPr sz="1600" b="1" i="0">
                 <a:solidFill>
-                  <a:srgbClr val="FFFFFF"/>
+                  <a:srgbClr val="494027"/>
                 </a:solidFill>
               </a:rPr>
               <a:t>1</a:t>
@@ -4566,13 +4937,13 @@
       </p:sp>
       <p:sp>
         <p:nvSpPr>
-          <p:cNvPr id="6" name="TextBox 5"/>
+          <p:cNvPr id="9" name="TextBox 8"/>
           <p:cNvSpPr txBox="1"/>
           <p:nvPr/>
         </p:nvSpPr>
         <p:spPr>
           <a:xfrm>
-            <a:off x="777240" y="2377440"/>
+            <a:off x="777240" y="2560320"/>
             <a:ext cx="3210458" cy="640080"/>
           </a:xfrm>
           <a:prstGeom prst="rect">
@@ -4594,7 +4965,7 @@
             <a:r>
               <a:rPr sz="1800" b="1" i="0">
                 <a:solidFill>
-                  <a:srgbClr val="544212"/>
+                  <a:srgbClr val="494027"/>
                 </a:solidFill>
               </a:rPr>
               <a:t>지하철</a:t>
@@ -4604,14 +4975,14 @@
       </p:sp>
       <p:sp>
         <p:nvSpPr>
-          <p:cNvPr id="7" name="TextBox 6"/>
+          <p:cNvPr id="10" name="TextBox 9"/>
           <p:cNvSpPr txBox="1"/>
           <p:nvPr/>
         </p:nvSpPr>
         <p:spPr>
           <a:xfrm>
-            <a:off x="777240" y="3063240"/>
-            <a:ext cx="3210458" cy="3200400"/>
+            <a:off x="777240" y="3246120"/>
+            <a:ext cx="3210458" cy="2788920"/>
           </a:xfrm>
           <a:prstGeom prst="rect">
             <a:avLst/>
@@ -4632,7 +5003,7 @@
             <a:r>
               <a:rPr sz="1500" b="0" i="0">
                 <a:solidFill>
-                  <a:srgbClr val="2B2B2B"/>
+                  <a:srgbClr val="26231F"/>
                 </a:solidFill>
               </a:rPr>
               <a:t>입력하세요</a:t>
@@ -4642,26 +5013,24 @@
       </p:sp>
       <p:sp>
         <p:nvSpPr>
-          <p:cNvPr id="8" name="카드 2"/>
+          <p:cNvPr id="11" name="카드 2"/>
           <p:cNvSpPr/>
           <p:nvPr/>
         </p:nvSpPr>
         <p:spPr>
           <a:xfrm>
-            <a:off x="4353458" y="1600200"/>
-            <a:ext cx="3484778" cy="4800600"/>
+            <a:off x="4353458" y="1783080"/>
+            <a:ext cx="3484778" cy="4389120"/>
           </a:xfrm>
           <a:prstGeom prst="roundRect">
             <a:avLst>
-              <a:gd name="adj" fmla="val 8000"/>
+              <a:gd name="adj" fmla="val 7000"/>
             </a:avLst>
           </a:prstGeom>
-          <a:solidFill>
-            <a:srgbClr val="FBF8EE"/>
-          </a:solidFill>
+          <a:noFill/>
           <a:ln w="15875">
             <a:solidFill>
-              <a:srgbClr val="F6EACB"/>
+              <a:srgbClr val="E1CE98"/>
             </a:solidFill>
           </a:ln>
         </p:spPr>
@@ -4675,23 +5044,23 @@
       </p:sp>
       <p:sp>
         <p:nvSpPr>
-          <p:cNvPr id="9" name="번호 2"/>
+          <p:cNvPr id="12" name="번호 2"/>
           <p:cNvSpPr/>
           <p:nvPr/>
         </p:nvSpPr>
         <p:spPr>
           <a:xfrm>
-            <a:off x="4536338" y="1783080"/>
+            <a:off x="4536338" y="1965960"/>
             <a:ext cx="457200" cy="457200"/>
           </a:xfrm>
           <a:prstGeom prst="ellipse">
             <a:avLst/>
           </a:prstGeom>
-          <a:solidFill>
-            <a:srgbClr val="A78425"/>
-          </a:solidFill>
-          <a:ln>
-            <a:noFill/>
+          <a:noFill/>
+          <a:ln w="19050">
+            <a:solidFill>
+              <a:srgbClr val="E1CE98"/>
+            </a:solidFill>
           </a:ln>
         </p:spPr>
         <p:txBody>
@@ -4708,7 +5077,7 @@
             <a:r>
               <a:rPr sz="1600" b="1" i="0">
                 <a:solidFill>
-                  <a:srgbClr val="FFFFFF"/>
+                  <a:srgbClr val="494027"/>
                 </a:solidFill>
               </a:rPr>
               <a:t>2</a:t>
@@ -4718,13 +5087,13 @@
       </p:sp>
       <p:sp>
         <p:nvSpPr>
-          <p:cNvPr id="10" name="TextBox 9"/>
+          <p:cNvPr id="13" name="TextBox 12"/>
           <p:cNvSpPr txBox="1"/>
           <p:nvPr/>
         </p:nvSpPr>
         <p:spPr>
           <a:xfrm>
-            <a:off x="4490618" y="2377440"/>
+            <a:off x="4490618" y="2560320"/>
             <a:ext cx="3210458" cy="640080"/>
           </a:xfrm>
           <a:prstGeom prst="rect">
@@ -4746,7 +5115,7 @@
             <a:r>
               <a:rPr sz="1800" b="1" i="0">
                 <a:solidFill>
-                  <a:srgbClr val="544212"/>
+                  <a:srgbClr val="494027"/>
                 </a:solidFill>
               </a:rPr>
               <a:t>버스</a:t>
@@ -4756,14 +5125,14 @@
       </p:sp>
       <p:sp>
         <p:nvSpPr>
-          <p:cNvPr id="11" name="TextBox 10"/>
+          <p:cNvPr id="14" name="TextBox 13"/>
           <p:cNvSpPr txBox="1"/>
           <p:nvPr/>
         </p:nvSpPr>
         <p:spPr>
           <a:xfrm>
-            <a:off x="4490618" y="3063240"/>
-            <a:ext cx="3210458" cy="3200400"/>
+            <a:off x="4490618" y="3246120"/>
+            <a:ext cx="3210458" cy="2788920"/>
           </a:xfrm>
           <a:prstGeom prst="rect">
             <a:avLst/>
@@ -4784,7 +5153,7 @@
             <a:r>
               <a:rPr sz="1500" b="0" i="0">
                 <a:solidFill>
-                  <a:srgbClr val="2B2B2B"/>
+                  <a:srgbClr val="26231F"/>
                 </a:solidFill>
               </a:rPr>
               <a:t>입력하세요</a:t>
@@ -4794,26 +5163,24 @@
       </p:sp>
       <p:sp>
         <p:nvSpPr>
-          <p:cNvPr id="12" name="카드 3"/>
+          <p:cNvPr id="15" name="카드 3"/>
           <p:cNvSpPr/>
           <p:nvPr/>
         </p:nvSpPr>
         <p:spPr>
           <a:xfrm>
-            <a:off x="8066836" y="1600200"/>
-            <a:ext cx="3484778" cy="4800600"/>
+            <a:off x="8066836" y="1783080"/>
+            <a:ext cx="3484778" cy="4389120"/>
           </a:xfrm>
           <a:prstGeom prst="roundRect">
             <a:avLst>
-              <a:gd name="adj" fmla="val 8000"/>
+              <a:gd name="adj" fmla="val 7000"/>
             </a:avLst>
           </a:prstGeom>
-          <a:solidFill>
-            <a:srgbClr val="FBF8EE"/>
-          </a:solidFill>
+          <a:noFill/>
           <a:ln w="15875">
             <a:solidFill>
-              <a:srgbClr val="F6EACB"/>
+              <a:srgbClr val="E1CE98"/>
             </a:solidFill>
           </a:ln>
         </p:spPr>
@@ -4827,23 +5194,23 @@
       </p:sp>
       <p:sp>
         <p:nvSpPr>
-          <p:cNvPr id="13" name="번호 3"/>
+          <p:cNvPr id="16" name="번호 3"/>
           <p:cNvSpPr/>
           <p:nvPr/>
         </p:nvSpPr>
         <p:spPr>
           <a:xfrm>
-            <a:off x="8249716" y="1783080"/>
+            <a:off x="8249716" y="1965960"/>
             <a:ext cx="457200" cy="457200"/>
           </a:xfrm>
           <a:prstGeom prst="ellipse">
             <a:avLst/>
           </a:prstGeom>
-          <a:solidFill>
-            <a:srgbClr val="A78425"/>
-          </a:solidFill>
-          <a:ln>
-            <a:noFill/>
+          <a:noFill/>
+          <a:ln w="19050">
+            <a:solidFill>
+              <a:srgbClr val="E1CE98"/>
+            </a:solidFill>
           </a:ln>
         </p:spPr>
         <p:txBody>
@@ -4860,7 +5227,7 @@
             <a:r>
               <a:rPr sz="1600" b="1" i="0">
                 <a:solidFill>
-                  <a:srgbClr val="FFFFFF"/>
+                  <a:srgbClr val="494027"/>
                 </a:solidFill>
               </a:rPr>
               <a:t>3</a:t>
@@ -4870,13 +5237,13 @@
       </p:sp>
       <p:sp>
         <p:nvSpPr>
-          <p:cNvPr id="14" name="TextBox 13"/>
+          <p:cNvPr id="17" name="TextBox 16"/>
           <p:cNvSpPr txBox="1"/>
           <p:nvPr/>
         </p:nvSpPr>
         <p:spPr>
           <a:xfrm>
-            <a:off x="8203996" y="2377440"/>
+            <a:off x="8203996" y="2560320"/>
             <a:ext cx="3210458" cy="640080"/>
           </a:xfrm>
           <a:prstGeom prst="rect">
@@ -4898,7 +5265,7 @@
             <a:r>
               <a:rPr sz="1800" b="1" i="0">
                 <a:solidFill>
-                  <a:srgbClr val="544212"/>
+                  <a:srgbClr val="494027"/>
                 </a:solidFill>
               </a:rPr>
               <a:t>자가용 · 주차</a:t>
@@ -4908,14 +5275,14 @@
       </p:sp>
       <p:sp>
         <p:nvSpPr>
-          <p:cNvPr id="15" name="TextBox 14"/>
+          <p:cNvPr id="18" name="TextBox 17"/>
           <p:cNvSpPr txBox="1"/>
           <p:nvPr/>
         </p:nvSpPr>
         <p:spPr>
           <a:xfrm>
-            <a:off x="8203996" y="3063240"/>
-            <a:ext cx="3210458" cy="3200400"/>
+            <a:off x="8203996" y="3246120"/>
+            <a:ext cx="3210458" cy="2788920"/>
           </a:xfrm>
           <a:prstGeom prst="rect">
             <a:avLst/>
@@ -4936,7 +5303,7 @@
             <a:r>
               <a:rPr sz="1500" b="0" i="0">
                 <a:solidFill>
-                  <a:srgbClr val="2B2B2B"/>
+                  <a:srgbClr val="26231F"/>
                 </a:solidFill>
               </a:rPr>
               <a:t>입력하세요</a:t>
@@ -4958,7 +5325,7 @@
     <p:bg>
       <p:bgPr>
         <a:solidFill>
-          <a:srgbClr val="FBF8EE"/>
+          <a:srgbClr val="FFFFFF"/>
         </a:solidFill>
         <a:effectLst/>
       </p:bgPr>
@@ -4977,18 +5344,15 @@
           <p:nvPr/>
         </p:nvSpPr>
         <p:spPr>
-          <a:xfrm rot="10800000">
-            <a:off x="10637215" y="0"/>
-            <a:ext cx="914400" cy="1554480"/>
-          </a:xfrm>
-          <a:prstGeom prst="round2SameRect">
-            <a:avLst>
-              <a:gd name="adj1" fmla="val 50000"/>
-              <a:gd name="adj2" fmla="val 0"/>
-            </a:avLst>
+          <a:xfrm>
+            <a:off x="0" y="6565392"/>
+            <a:ext cx="12191695" cy="292608"/>
+          </a:xfrm>
+          <a:prstGeom prst="rect">
+            <a:avLst/>
           </a:prstGeom>
           <a:solidFill>
-            <a:srgbClr val="F6EACB"/>
+            <a:srgbClr val="EBDAAD"/>
           </a:solidFill>
           <a:ln>
             <a:noFill/>
@@ -5004,6 +5368,104 @@
       </p:sp>
       <p:sp>
         <p:nvSpPr>
+          <p:cNvPr id="4" name="장식"/>
+          <p:cNvSpPr/>
+          <p:nvPr/>
+        </p:nvSpPr>
+        <p:spPr>
+          <a:xfrm>
+            <a:off x="640080" y="566928"/>
+            <a:ext cx="64008" cy="868680"/>
+          </a:xfrm>
+          <a:prstGeom prst="roundRect">
+            <a:avLst>
+              <a:gd name="adj" fmla="val 50000"/>
+            </a:avLst>
+          </a:prstGeom>
+          <a:solidFill>
+            <a:srgbClr val="E1CE98"/>
+          </a:solidFill>
+          <a:ln>
+            <a:noFill/>
+          </a:ln>
+        </p:spPr>
+        <p:txBody>
+          <a:bodyPr rtlCol="0" anchor="ctr"/>
+          <a:lstStyle/>
+          <a:p>
+            <a:pPr algn="ctr"/>
+          </a:p>
+        </p:txBody>
+      </p:sp>
+      <p:sp>
+        <p:nvSpPr>
+          <p:cNvPr id="5" name="상단 라벨"/>
+          <p:cNvSpPr txBox="1"/>
+          <p:nvPr/>
+        </p:nvSpPr>
+        <p:spPr>
+          <a:xfrm>
+            <a:off x="868680" y="274320"/>
+            <a:ext cx="5486400" cy="274320"/>
+          </a:xfrm>
+          <a:prstGeom prst="rect">
+            <a:avLst/>
+          </a:prstGeom>
+          <a:noFill/>
+        </p:spPr>
+        <p:txBody>
+          <a:bodyPr wrap="square" lIns="54864" rIns="54864" tIns="27432" bIns="27432" anchor="ctr">
+            <a:noAutofit/>
+          </a:bodyPr>
+          <a:lstStyle/>
+          <a:p>
+            <a:pPr algn="l">
+              <a:lnSpc>
+                <a:spcPct val="115000"/>
+              </a:lnSpc>
+            </a:pPr>
+            <a:r>
+              <a:rPr sz="900" b="1" i="0" spc="250">
+                <a:solidFill>
+                  <a:srgbClr val="8E8780"/>
+                </a:solidFill>
+              </a:rPr>
+              <a:t>WEDDING</a:t>
+            </a:r>
+          </a:p>
+        </p:txBody>
+      </p:sp>
+      <p:sp>
+        <p:nvSpPr>
+          <p:cNvPr id="6" name="포인트"/>
+          <p:cNvSpPr/>
+          <p:nvPr/>
+        </p:nvSpPr>
+        <p:spPr>
+          <a:xfrm>
+            <a:off x="11167567" y="667512"/>
+            <a:ext cx="310896" cy="310896"/>
+          </a:xfrm>
+          <a:prstGeom prst="round2SameRect">
+            <a:avLst/>
+          </a:prstGeom>
+          <a:solidFill>
+            <a:srgbClr val="EBDAAD"/>
+          </a:solidFill>
+          <a:ln>
+            <a:noFill/>
+          </a:ln>
+        </p:spPr>
+        <p:txBody>
+          <a:bodyPr rtlCol="0" anchor="ctr"/>
+          <a:lstStyle/>
+          <a:p>
+            <a:pPr algn="ctr"/>
+          </a:p>
+        </p:txBody>
+      </p:sp>
+      <p:sp>
+        <p:nvSpPr>
           <p:cNvPr id="2" name="Title 1"/>
           <p:cNvSpPr>
             <a:spLocks noGrp="1"/>
@@ -5014,8 +5476,8 @@
         </p:nvSpPr>
         <p:spPr>
           <a:xfrm>
-            <a:off x="640080" y="457200"/>
-            <a:ext cx="9722815" cy="868680"/>
+            <a:off x="868680" y="566928"/>
+            <a:ext cx="9448495" cy="868680"/>
           </a:xfrm>
         </p:spPr>
         <p:txBody>
@@ -5032,7 +5494,7 @@
             <a:r>
               <a:rPr sz="3000" b="1" i="0">
                 <a:solidFill>
-                  <a:srgbClr val="544212"/>
+                  <a:srgbClr val="26231F"/>
                 </a:solidFill>
               </a:rPr>
               <a:t>웨딩 사진</a:t>
@@ -5042,14 +5504,14 @@
       </p:sp>
       <p:sp>
         <p:nvSpPr>
-          <p:cNvPr id="4" name="사진 자리"/>
+          <p:cNvPr id="7" name="사진 자리"/>
           <p:cNvSpPr/>
           <p:nvPr/>
         </p:nvSpPr>
         <p:spPr>
           <a:xfrm>
-            <a:off x="640080" y="1600200"/>
-            <a:ext cx="3515258" cy="2308860"/>
+            <a:off x="640080" y="1783080"/>
+            <a:ext cx="3515258" cy="2103120"/>
           </a:xfrm>
           <a:prstGeom prst="roundRect">
             <a:avLst>
@@ -5057,12 +5519,10 @@
             </a:avLst>
           </a:prstGeom>
           <a:solidFill>
-            <a:srgbClr val="F6EACB"/>
+            <a:srgbClr val="F6EDD5"/>
           </a:solidFill>
           <a:ln w="19050">
-            <a:solidFill>
-              <a:srgbClr val="A78425"/>
-            </a:solidFill>
+            <a:noFill/>
             <a:prstDash val="dash"/>
           </a:ln>
         </p:spPr>
@@ -5080,7 +5540,7 @@
             <a:r>
               <a:rPr sz="1200" b="0" i="0">
                 <a:solidFill>
-                  <a:srgbClr val="544212"/>
+                  <a:srgbClr val="8E8780"/>
                 </a:solidFill>
               </a:rPr>
               <a:t>사진 1</a:t>
@@ -5090,14 +5550,14 @@
       </p:sp>
       <p:sp>
         <p:nvSpPr>
-          <p:cNvPr id="5" name="사진 자리"/>
+          <p:cNvPr id="8" name="사진 자리"/>
           <p:cNvSpPr/>
           <p:nvPr/>
         </p:nvSpPr>
         <p:spPr>
           <a:xfrm>
-            <a:off x="4338218" y="1600200"/>
-            <a:ext cx="3515258" cy="2308860"/>
+            <a:off x="4338218" y="1783080"/>
+            <a:ext cx="3515258" cy="2103120"/>
           </a:xfrm>
           <a:prstGeom prst="roundRect">
             <a:avLst>
@@ -5105,12 +5565,10 @@
             </a:avLst>
           </a:prstGeom>
           <a:solidFill>
-            <a:srgbClr val="F6EACB"/>
+            <a:srgbClr val="F6EDD5"/>
           </a:solidFill>
           <a:ln w="19050">
-            <a:solidFill>
-              <a:srgbClr val="A78425"/>
-            </a:solidFill>
+            <a:noFill/>
             <a:prstDash val="dash"/>
           </a:ln>
         </p:spPr>
@@ -5128,7 +5586,7 @@
             <a:r>
               <a:rPr sz="1200" b="0" i="0">
                 <a:solidFill>
-                  <a:srgbClr val="544212"/>
+                  <a:srgbClr val="8E8780"/>
                 </a:solidFill>
               </a:rPr>
               <a:t>사진 2</a:t>
@@ -5138,14 +5596,14 @@
       </p:sp>
       <p:sp>
         <p:nvSpPr>
-          <p:cNvPr id="6" name="사진 자리"/>
+          <p:cNvPr id="9" name="사진 자리"/>
           <p:cNvSpPr/>
           <p:nvPr/>
         </p:nvSpPr>
         <p:spPr>
           <a:xfrm>
-            <a:off x="8036356" y="1600200"/>
-            <a:ext cx="3515258" cy="2308860"/>
+            <a:off x="8036356" y="1783080"/>
+            <a:ext cx="3515258" cy="2103120"/>
           </a:xfrm>
           <a:prstGeom prst="roundRect">
             <a:avLst>
@@ -5153,12 +5611,10 @@
             </a:avLst>
           </a:prstGeom>
           <a:solidFill>
-            <a:srgbClr val="F6EACB"/>
+            <a:srgbClr val="F6EDD5"/>
           </a:solidFill>
           <a:ln w="19050">
-            <a:solidFill>
-              <a:srgbClr val="A78425"/>
-            </a:solidFill>
+            <a:noFill/>
             <a:prstDash val="dash"/>
           </a:ln>
         </p:spPr>
@@ -5176,7 +5632,7 @@
             <a:r>
               <a:rPr sz="1200" b="0" i="0">
                 <a:solidFill>
-                  <a:srgbClr val="544212"/>
+                  <a:srgbClr val="8E8780"/>
                 </a:solidFill>
               </a:rPr>
               <a:t>사진 3</a:t>
@@ -5186,14 +5642,14 @@
       </p:sp>
       <p:sp>
         <p:nvSpPr>
-          <p:cNvPr id="7" name="사진 자리"/>
+          <p:cNvPr id="10" name="사진 자리"/>
           <p:cNvSpPr/>
           <p:nvPr/>
         </p:nvSpPr>
         <p:spPr>
           <a:xfrm>
-            <a:off x="640080" y="4091939"/>
-            <a:ext cx="3515258" cy="2308860"/>
+            <a:off x="640080" y="4069080"/>
+            <a:ext cx="3515258" cy="2103120"/>
           </a:xfrm>
           <a:prstGeom prst="roundRect">
             <a:avLst>
@@ -5201,12 +5657,10 @@
             </a:avLst>
           </a:prstGeom>
           <a:solidFill>
-            <a:srgbClr val="F6EACB"/>
+            <a:srgbClr val="F6EDD5"/>
           </a:solidFill>
           <a:ln w="19050">
-            <a:solidFill>
-              <a:srgbClr val="A78425"/>
-            </a:solidFill>
+            <a:noFill/>
             <a:prstDash val="dash"/>
           </a:ln>
         </p:spPr>
@@ -5224,7 +5678,7 @@
             <a:r>
               <a:rPr sz="1200" b="0" i="0">
                 <a:solidFill>
-                  <a:srgbClr val="544212"/>
+                  <a:srgbClr val="8E8780"/>
                 </a:solidFill>
               </a:rPr>
               <a:t>사진 4</a:t>
@@ -5234,14 +5688,14 @@
       </p:sp>
       <p:sp>
         <p:nvSpPr>
-          <p:cNvPr id="8" name="사진 자리"/>
+          <p:cNvPr id="11" name="사진 자리"/>
           <p:cNvSpPr/>
           <p:nvPr/>
         </p:nvSpPr>
         <p:spPr>
           <a:xfrm>
-            <a:off x="4338218" y="4091939"/>
-            <a:ext cx="3515258" cy="2308860"/>
+            <a:off x="4338218" y="4069080"/>
+            <a:ext cx="3515258" cy="2103120"/>
           </a:xfrm>
           <a:prstGeom prst="roundRect">
             <a:avLst>
@@ -5249,12 +5703,10 @@
             </a:avLst>
           </a:prstGeom>
           <a:solidFill>
-            <a:srgbClr val="F6EACB"/>
+            <a:srgbClr val="F6EDD5"/>
           </a:solidFill>
           <a:ln w="19050">
-            <a:solidFill>
-              <a:srgbClr val="A78425"/>
-            </a:solidFill>
+            <a:noFill/>
             <a:prstDash val="dash"/>
           </a:ln>
         </p:spPr>
@@ -5272,7 +5724,7 @@
             <a:r>
               <a:rPr sz="1200" b="0" i="0">
                 <a:solidFill>
-                  <a:srgbClr val="544212"/>
+                  <a:srgbClr val="8E8780"/>
                 </a:solidFill>
               </a:rPr>
               <a:t>사진 5</a:t>
@@ -5282,14 +5734,14 @@
       </p:sp>
       <p:sp>
         <p:nvSpPr>
-          <p:cNvPr id="9" name="사진 자리"/>
+          <p:cNvPr id="12" name="사진 자리"/>
           <p:cNvSpPr/>
           <p:nvPr/>
         </p:nvSpPr>
         <p:spPr>
           <a:xfrm>
-            <a:off x="8036356" y="4091939"/>
-            <a:ext cx="3515258" cy="2308860"/>
+            <a:off x="8036356" y="4069080"/>
+            <a:ext cx="3515258" cy="2103120"/>
           </a:xfrm>
           <a:prstGeom prst="roundRect">
             <a:avLst>
@@ -5297,12 +5749,10 @@
             </a:avLst>
           </a:prstGeom>
           <a:solidFill>
-            <a:srgbClr val="F6EACB"/>
+            <a:srgbClr val="F6EDD5"/>
           </a:solidFill>
           <a:ln w="19050">
-            <a:solidFill>
-              <a:srgbClr val="A78425"/>
-            </a:solidFill>
+            <a:noFill/>
             <a:prstDash val="dash"/>
           </a:ln>
         </p:spPr>
@@ -5320,7 +5770,7 @@
             <a:r>
               <a:rPr sz="1200" b="0" i="0">
                 <a:solidFill>
-                  <a:srgbClr val="544212"/>
+                  <a:srgbClr val="8E8780"/>
                 </a:solidFill>
               </a:rPr>
               <a:t>사진 6</a:t>
@@ -5339,6 +5789,14 @@
 <file path=ppt/slides/slide6.xml><?xml version="1.0" encoding="utf-8"?>
 <p:sld xmlns:a="http://schemas.openxmlformats.org/drawingml/2006/main" xmlns:p="http://schemas.openxmlformats.org/presentationml/2006/main" xmlns:r="http://schemas.openxmlformats.org/officeDocument/2006/relationships">
   <p:cSld>
+    <p:bg>
+      <p:bgPr>
+        <a:solidFill>
+          <a:srgbClr val="F6EDD5"/>
+        </a:solidFill>
+        <a:effectLst/>
+      </p:bgPr>
+    </p:bg>
     <p:spTree>
       <p:nvGrpSpPr>
         <p:cNvPr id="1" name=""/>
@@ -5346,30 +5804,116 @@
         <p:nvPr/>
       </p:nvGrpSpPr>
       <p:grpSpPr/>
-      <p:pic>
-        <p:nvPicPr>
-          <p:cNvPr id="3" name="표지 그림" descr="wedding-44.jpg"/>
-          <p:cNvPicPr>
-            <a:picLocks noChangeAspect="1"/>
-          </p:cNvPicPr>
+      <p:sp>
+        <p:nvSpPr>
+          <p:cNvPr id="3" name="사진 자리"/>
+          <p:cNvSpPr/>
           <p:nvPr/>
-        </p:nvPicPr>
-        <p:blipFill>
-          <a:blip r:embed="rId2"/>
-          <a:stretch>
-            <a:fillRect/>
-          </a:stretch>
-        </p:blipFill>
-        <p:spPr>
-          <a:xfrm>
-            <a:off x="0" y="0"/>
-            <a:ext cx="12191695" cy="6858000"/>
+        </p:nvSpPr>
+        <p:spPr>
+          <a:xfrm>
+            <a:off x="7802684" y="0"/>
+            <a:ext cx="4389010" cy="6858000"/>
           </a:xfrm>
           <a:prstGeom prst="rect">
             <a:avLst/>
           </a:prstGeom>
-        </p:spPr>
-      </p:pic>
+          <a:solidFill>
+            <a:srgbClr val="EBDAAD"/>
+          </a:solidFill>
+          <a:ln>
+            <a:noFill/>
+          </a:ln>
+        </p:spPr>
+        <p:txBody>
+          <a:bodyPr rtlCol="0" anchor="ctr" wrap="square" lIns="54864" rIns="54864" tIns="27432" bIns="27432">
+            <a:noAutofit/>
+          </a:bodyPr>
+          <a:lstStyle/>
+          <a:p>
+            <a:pPr algn="ctr">
+              <a:lnSpc>
+                <a:spcPct val="100000"/>
+              </a:lnSpc>
+            </a:pPr>
+            <a:r>
+              <a:rPr sz="1400" b="0" i="0">
+                <a:solidFill>
+                  <a:srgbClr val="494027"/>
+                </a:solidFill>
+              </a:rPr>
+              <a:t>사진을 넣어 주세요</a:t>
+            </a:r>
+          </a:p>
+        </p:txBody>
+      </p:sp>
+      <p:sp>
+        <p:nvSpPr>
+          <p:cNvPr id="4" name="장식"/>
+          <p:cNvSpPr/>
+          <p:nvPr/>
+        </p:nvSpPr>
+        <p:spPr>
+          <a:xfrm>
+            <a:off x="8168435" y="365760"/>
+            <a:ext cx="3657508" cy="6126480"/>
+          </a:xfrm>
+          <a:prstGeom prst="rect">
+            <a:avLst/>
+          </a:prstGeom>
+          <a:noFill/>
+          <a:ln w="9525">
+            <a:solidFill>
+              <a:srgbClr val="26231F"/>
+            </a:solidFill>
+          </a:ln>
+        </p:spPr>
+        <p:txBody>
+          <a:bodyPr rtlCol="0" anchor="ctr"/>
+          <a:lstStyle/>
+          <a:p>
+            <a:pPr algn="ctr"/>
+          </a:p>
+        </p:txBody>
+      </p:sp>
+      <p:sp>
+        <p:nvSpPr>
+          <p:cNvPr id="5" name="라벨"/>
+          <p:cNvSpPr txBox="1"/>
+          <p:nvPr/>
+        </p:nvSpPr>
+        <p:spPr>
+          <a:xfrm>
+            <a:off x="822960" y="2148840"/>
+            <a:ext cx="5608179" cy="274320"/>
+          </a:xfrm>
+          <a:prstGeom prst="rect">
+            <a:avLst/>
+          </a:prstGeom>
+          <a:noFill/>
+        </p:spPr>
+        <p:txBody>
+          <a:bodyPr wrap="square" lIns="54864" rIns="54864" tIns="27432" bIns="27432" anchor="t">
+            <a:noAutofit/>
+          </a:bodyPr>
+          <a:lstStyle/>
+          <a:p>
+            <a:pPr algn="l">
+              <a:lnSpc>
+                <a:spcPct val="115000"/>
+              </a:lnSpc>
+            </a:pPr>
+            <a:r>
+              <a:rPr sz="1000" b="1" i="0" spc="250">
+                <a:solidFill>
+                  <a:srgbClr val="26231F"/>
+                </a:solidFill>
+              </a:rPr>
+              <a:t>WEDDING</a:t>
+            </a:r>
+          </a:p>
+        </p:txBody>
+      </p:sp>
       <p:sp>
         <p:nvSpPr>
           <p:cNvPr id="2" name="Title 1"/>
@@ -5382,8 +5926,8 @@
         </p:nvSpPr>
         <p:spPr>
           <a:xfrm>
-            <a:off x="853418" y="2057400"/>
-            <a:ext cx="6095847" cy="1554480"/>
+            <a:off x="822960" y="2606040"/>
+            <a:ext cx="5608179" cy="1188720"/>
           </a:xfrm>
         </p:spPr>
         <p:txBody>
@@ -5400,7 +5944,7 @@
             <a:r>
               <a:rPr sz="3400" b="1" i="0">
                 <a:solidFill>
-                  <a:srgbClr val="544212"/>
+                  <a:srgbClr val="26231F"/>
                 </a:solidFill>
               </a:rPr>
               <a:t>와 주셔서 고맙습니다</a:t>
@@ -5410,14 +5954,14 @@
       </p:sp>
       <p:sp>
         <p:nvSpPr>
-          <p:cNvPr id="4" name="한 줄 문구"/>
+          <p:cNvPr id="6" name="한 줄 문구"/>
           <p:cNvSpPr txBox="1"/>
           <p:nvPr/>
         </p:nvSpPr>
         <p:spPr>
           <a:xfrm>
-            <a:off x="853418" y="3749039"/>
-            <a:ext cx="6095847" cy="822960"/>
+            <a:off x="822960" y="3886200"/>
+            <a:ext cx="5608179" cy="822960"/>
           </a:xfrm>
           <a:prstGeom prst="rect">
             <a:avLst/>
@@ -5436,9 +5980,9 @@
               </a:lnSpc>
             </a:pPr>
             <a:r>
-              <a:rPr sz="1700" b="0" i="1">
-                <a:solidFill>
-                  <a:srgbClr val="544212"/>
+              <a:rPr sz="1700" b="0" i="0">
+                <a:solidFill>
+                  <a:srgbClr val="26231F"/>
                 </a:solidFill>
               </a:rPr>
               <a:t>잘 살겠습니다</a:t>
@@ -5448,14 +5992,14 @@
       </p:sp>
       <p:sp>
         <p:nvSpPr>
-          <p:cNvPr id="5" name="안내 문구"/>
+          <p:cNvPr id="7" name="안내 문구"/>
           <p:cNvSpPr txBox="1"/>
           <p:nvPr/>
         </p:nvSpPr>
         <p:spPr>
           <a:xfrm>
-            <a:off x="853418" y="4617720"/>
-            <a:ext cx="6095847" cy="914400"/>
+            <a:off x="822960" y="4754880"/>
+            <a:ext cx="5608179" cy="914400"/>
           </a:xfrm>
           <a:prstGeom prst="rect">
             <a:avLst/>
@@ -5476,7 +6020,7 @@
             <a:r>
               <a:rPr sz="1400" b="0" i="0">
                 <a:solidFill>
-                  <a:srgbClr val="666666"/>
+                  <a:srgbClr val="26231F"/>
                 </a:solidFill>
               </a:rPr>
               <a:t>신랑 이름 ♥ 신부 이름</a:t>
@@ -5503,34 +6047,34 @@
         <a:sysClr val="window" lastClr="FFFFFF"/>
       </a:lt1>
       <a:dk2>
-        <a:srgbClr val="544212"/>
+        <a:srgbClr val="494027"/>
       </a:dk2>
       <a:lt2>
-        <a:srgbClr val="FBF8EE"/>
+        <a:srgbClr val="FBF7EC"/>
       </a:lt2>
       <a:accent1>
-        <a:srgbClr val="A78425"/>
+        <a:srgbClr val="E1CE98"/>
       </a:accent1>
       <a:accent2>
-        <a:srgbClr val="3B7D91"/>
+        <a:srgbClr val="E0EAB8"/>
       </a:accent2>
       <a:accent3>
-        <a:srgbClr val="544212"/>
+        <a:srgbClr val="494027"/>
       </a:accent3>
       <a:accent4>
-        <a:srgbClr val="F6EACB"/>
+        <a:srgbClr val="F6EDD5"/>
       </a:accent4>
       <a:accent5>
-        <a:srgbClr val="71805B"/>
+        <a:srgbClr val="E0DCA8"/>
       </a:accent5>
       <a:accent6>
-        <a:srgbClr val="988E71"/>
+        <a:srgbClr val="928C7D"/>
       </a:accent6>
       <a:hlink>
-        <a:srgbClr val="A78425"/>
+        <a:srgbClr val="E1CE98"/>
       </a:hlink>
       <a:folHlink>
-        <a:srgbClr val="544212"/>
+        <a:srgbClr val="494027"/>
       </a:folHlink>
     </a:clrScheme>
     <a:fontScheme name="Office">
